--- a/decks/combined-waves/combined-waves_ch6_sound-and-ultrasound.pptx
+++ b/decks/combined-waves/combined-waves_ch6_sound-and-ultrasound.pptx
@@ -125,29 +125,29 @@
   <p:extLst>
     <p:ext uri="{521415D9-36F7-43E2-AB2F-B90AF26B5E84}">
       <p14:sectionLst xmlns:p14="http://schemas.microsoft.com/office/powerpoint/2010/main">
-        <p14:section name="Opening" id="{e14058e0-db57-185e-d177-b6b2b56d8575}">
+        <p14:section name="Opening" id="{c776d553-7f9b-7e6f-978b-942049531e27}">
           <p14:sldIdLst>
             <p14:sldId id="256"/>
           </p14:sldIdLst>
         </p14:section>
-        <p14:section name="Gate" id="{2bfae88a-c99b-ece3-3bd7-627fc30b7705}">
+        <p14:section name="Gate" id="{b8e00b26-7f84-c6af-1057-0d05939c9df8}">
           <p14:sldIdLst>
             <p14:sldId id="257"/>
             <p14:sldId id="258"/>
           </p14:sldIdLst>
         </p14:section>
-        <p14:section name="Pre-teach" id="{5091dee1-e4b4-b4d8-d18c-4dad884bfe70}">
+        <p14:section name="Pre-teach" id="{ca8c8244-4d1a-2d32-ed72-3905c9939707}">
           <p14:sldIdLst>
             <p14:sldId id="259"/>
           </p14:sldIdLst>
         </p14:section>
-        <p14:section name="Read-along" id="{dcce7e30-dba2-fdcd-d6ef-7e94412ce7d6}">
+        <p14:section name="Read-along" id="{f0a7f805-69a0-2aed-569e-eb46ef234ccb}">
           <p14:sldIdLst>
             <p14:sldId id="260"/>
             <p14:sldId id="261"/>
           </p14:sldIdLst>
         </p14:section>
-        <p14:section name="Teach" id="{87b43c1b-f2b0-e8b0-61f3-96ee8eb93388}">
+        <p14:section name="Teach" id="{e9890026-73ba-6c87-e9bf-74b6cfc27829}">
           <p14:sldIdLst>
             <p14:sldId id="262"/>
             <p14:sldId id="263"/>
@@ -156,7 +156,7 @@
             <p14:sldId id="266"/>
           </p14:sldIdLst>
         </p14:section>
-        <p14:section name="Routes" id="{97fed1bc-510f-1973-b7f5-56b6ef0c14eb}">
+        <p14:section name="Routes" id="{7e030520-a854-cd21-749c-d14aaf88e22f}">
           <p14:sldIdLst>
             <p14:sldId id="267"/>
             <p14:sldId id="268"/>
@@ -164,12 +164,12 @@
             <p14:sldId id="270"/>
           </p14:sldIdLst>
         </p14:section>
-        <p14:section name="Close" id="{0d9453a2-d414-a2ba-a3cf-f38a733ea2a7}">
+        <p14:section name="Close" id="{186b3826-6176-e7fc-91c6-f4ba9cb50d4b}">
           <p14:sldIdLst>
             <p14:sldId id="271"/>
           </p14:sldIdLst>
         </p14:section>
-        <p14:section name="Answers" id="{f5b8d016-30f7-1cb9-4fde-86d11360a666}">
+        <p14:section name="Answers" id="{a16ce45e-f921-5ff8-e21a-d1a0ff988a38}">
           <p14:sldIdLst>
             <p14:sldId id="272"/>
             <p14:sldId id="273"/>
@@ -1600,7 +1600,7 @@
               <a:rPr lang="en-US" dirty="0"/>
               <a:t>Do now — retrieval. Silent, no notes, no help: recall comes before any support. Give about four minutes.
 1. Sound with a frequency above 20 000 Hz is called ___.  →  ultrasound
-2. Which change makes a sound louder?  →  A   a larger amplitude
+2. Which change makes a sound louder?  →  B   a larger amplitude
 3. A ship's echo sounder sends a pulse towards the seabed. The echo returns after 0.20 s. Sound travels through water at 1500 m/s. Calculate the depth of the water in metres.  →  150 m
 Circulate: who gets 3/3 (Stretch route), 2/3 (Core), 0–1 (Support)? Use this to route pupils later in the lesson.</a:t>
             </a:r>
@@ -1692,7 +1692,7 @@
               <a:rPr lang="en-US" dirty="0"/>
               <a:t>Answers — pupils mark their own in a different colour, then hands up for 3/3, 2/3, 1/3.
 1. ultrasound. Ultrasound is sound above the upper limit of human hearing, 20 000 Hz (20 kHz).
-2. A   a larger amplitude. Loudness depends on amplitude: a bigger amplitude carries more energy and sounds louder.
+2. B   a larger amplitude. Loudness depends on amplitude: a bigger amplitude carries more energy and sounds louder.
 3. 150 m. Depth = ½ × speed × time = ½ × 1500 × 0.20 = 150 m (exact).
 Say the route each score points to: 3/3 Stretch, 2/3 Core, 0–1 Support. Pupils may choose to move up.</a:t>
             </a:r>
@@ -10833,7 +10833,7 @@
                 <a:ea typeface="Calibri" pitchFamily="34" charset="-122"/>
                 <a:cs typeface="Calibri" pitchFamily="34" charset="-120"/>
               </a:rPr>
-              <a:t>a larger amplitude</a:t>
+              <a:t>a shorter wavelength</a:t>
             </a:r>
             <a:endParaRPr lang="en-US" sz="2400" dirty="0"/>
           </a:p>
@@ -10870,7 +10870,7 @@
                 <a:ea typeface="Calibri" pitchFamily="34" charset="-122"/>
                 <a:cs typeface="Calibri" pitchFamily="34" charset="-120"/>
               </a:rPr>
-              <a:t>a higher frequency</a:t>
+              <a:t>a larger amplitude</a:t>
             </a:r>
             <a:endParaRPr lang="en-US" sz="2400" dirty="0"/>
           </a:p>
@@ -10907,7 +10907,7 @@
                 <a:ea typeface="Calibri" pitchFamily="34" charset="-122"/>
                 <a:cs typeface="Calibri" pitchFamily="34" charset="-120"/>
               </a:rPr>
-              <a:t>a shorter wavelength</a:t>
+              <a:t>a higher frequency</a:t>
             </a:r>
             <a:endParaRPr lang="en-US" sz="2400" dirty="0"/>
           </a:p>
@@ -11793,7 +11793,7 @@
                 <a:ea typeface="Calibri" pitchFamily="34" charset="-122"/>
                 <a:cs typeface="Calibri" pitchFamily="34" charset="-120"/>
               </a:rPr>
-              <a:t>A   a larger amplitude</a:t>
+              <a:t>B   a larger amplitude</a:t>
             </a:r>
             <a:endParaRPr lang="en-US" sz="2200" dirty="0"/>
           </a:p>

--- a/decks/combined-waves/combined-waves_ch6_sound-and-ultrasound.pptx
+++ b/decks/combined-waves/combined-waves_ch6_sound-and-ultrasound.pptx
@@ -125,29 +125,29 @@
   <p:extLst>
     <p:ext uri="{521415D9-36F7-43E2-AB2F-B90AF26B5E84}">
       <p14:sectionLst xmlns:p14="http://schemas.microsoft.com/office/powerpoint/2010/main">
-        <p14:section name="Opening" id="{c776d553-7f9b-7e6f-978b-942049531e27}">
+        <p14:section name="Opening" id="{336e560f-6a10-942e-ac23-f04fa3dbd0d7}">
           <p14:sldIdLst>
             <p14:sldId id="256"/>
           </p14:sldIdLst>
         </p14:section>
-        <p14:section name="Gate" id="{b8e00b26-7f84-c6af-1057-0d05939c9df8}">
+        <p14:section name="Gate" id="{fa9dad0e-0b42-76ac-0f28-4bc87fb6a3e5}">
           <p14:sldIdLst>
             <p14:sldId id="257"/>
             <p14:sldId id="258"/>
           </p14:sldIdLst>
         </p14:section>
-        <p14:section name="Pre-teach" id="{ca8c8244-4d1a-2d32-ed72-3905c9939707}">
+        <p14:section name="Pre-teach" id="{9933c778-05c7-319b-8176-b6822f8e4f98}">
           <p14:sldIdLst>
             <p14:sldId id="259"/>
           </p14:sldIdLst>
         </p14:section>
-        <p14:section name="Read-along" id="{f0a7f805-69a0-2aed-569e-eb46ef234ccb}">
+        <p14:section name="Read-along" id="{d995ef5c-72a9-dc9e-4e2f-2bd3eb55f356}">
           <p14:sldIdLst>
             <p14:sldId id="260"/>
             <p14:sldId id="261"/>
           </p14:sldIdLst>
         </p14:section>
-        <p14:section name="Teach" id="{e9890026-73ba-6c87-e9bf-74b6cfc27829}">
+        <p14:section name="Teach" id="{a6f84adb-64ed-5f49-9f65-37e06e4338ee}">
           <p14:sldIdLst>
             <p14:sldId id="262"/>
             <p14:sldId id="263"/>
@@ -156,7 +156,7 @@
             <p14:sldId id="266"/>
           </p14:sldIdLst>
         </p14:section>
-        <p14:section name="Routes" id="{7e030520-a854-cd21-749c-d14aaf88e22f}">
+        <p14:section name="Routes" id="{634e9d46-0dd2-d44c-0bd5-aee9571a4d33}">
           <p14:sldIdLst>
             <p14:sldId id="267"/>
             <p14:sldId id="268"/>
@@ -164,12 +164,12 @@
             <p14:sldId id="270"/>
           </p14:sldIdLst>
         </p14:section>
-        <p14:section name="Close" id="{186b3826-6176-e7fc-91c6-f4ba9cb50d4b}">
+        <p14:section name="Close" id="{5d5a4169-3633-864f-a7e2-e06bc366028d}">
           <p14:sldIdLst>
             <p14:sldId id="271"/>
           </p14:sldIdLst>
         </p14:section>
-        <p14:section name="Answers" id="{a16ce45e-f921-5ff8-e21a-d1a0ff988a38}">
+        <p14:section name="Answers" id="{0835c581-4174-d561-b155-7ce5844ffbe1}">
           <p14:sldIdLst>
             <p14:sldId id="272"/>
             <p14:sldId id="273"/>
